--- a/dist/초2/과학/탐구의기초/초2_과학_탐구의기초_01_예상과관찰_학생용.pptx
+++ b/dist/초2/과학/탐구의기초/초2_과학_탐구의기초_01_예상과관찰_학생용.pptx
@@ -118,20 +118,20 @@
   <p:extLst>
     <p:ext uri="{521415D9-36F7-43E2-AB2F-B90AF26B5E84}">
       <p14:sectionLst xmlns:p14="http://schemas.microsoft.com/office/powerpoint/2010/main">
-        <p14:section name="도입" id="{b792ac68-aeea-9e72-1f60-bedd2547b29c}">
+        <p14:section name="도입" id="{56b4ad4d-d539-cced-d6db-1f5335d86afe}">
           <p14:sldIdLst>
             <p14:sldId id="256"/>
             <p14:sldId id="257"/>
           </p14:sldIdLst>
         </p14:section>
-        <p14:section name="개념" id="{02c50a2f-245f-6b84-2799-5978be0f3fa7}">
+        <p14:section name="개념" id="{4b6e0194-b7e5-d24d-5964-39c0dd4a7ec9}">
           <p14:sldIdLst>
             <p14:sldId id="258"/>
             <p14:sldId id="259"/>
             <p14:sldId id="261"/>
           </p14:sldIdLst>
         </p14:section>
-        <p14:section name="연습" id="{0135cf38-966f-9539-fa7d-22bfef7e80c9}">
+        <p14:section name="연습" id="{cea05d41-a1a0-f062-5190-883edba43c0f}">
           <p14:sldIdLst>
             <p14:sldId id="260"/>
             <p14:sldId id="262"/>
@@ -139,23 +139,23 @@
             <p14:sldId id="264"/>
           </p14:sldIdLst>
         </p14:section>
-        <p14:section name="개념" id="{1ca2d224-5a42-1129-3ba6-22162a70f28a}">
+        <p14:section name="개념" id="{97b58f60-55a4-a281-a6e5-6bb1599d3a71}">
           <p14:sldIdLst/>
         </p14:section>
-        <p14:section name="연습" id="{21ddf19f-382d-1bef-6d07-f4b39d5b08ea}">
+        <p14:section name="연습" id="{71d7ecfe-b3e5-edef-3128-f6f1b4a1bed2}">
           <p14:sldIdLst/>
         </p14:section>
-        <p14:section name="확인" id="{7d468c2d-176c-c444-94fa-bbe4a56af40c}">
+        <p14:section name="확인" id="{7725ab9f-b60c-5f7a-0527-9219bc72cf01}">
           <p14:sldIdLst>
             <p14:sldId id="265"/>
           </p14:sldIdLst>
         </p14:section>
-        <p14:section name="정리" id="{e30d3e7a-5759-d7af-5f6a-1c33fb3fce17}">
+        <p14:section name="정리" id="{cc94c640-cfb7-ecd1-ce7b-73d483200468}">
           <p14:sldIdLst>
             <p14:sldId id="266"/>
           </p14:sldIdLst>
         </p14:section>
-        <p14:section name="보충" id="{40bb276d-2f71-5e80-9ca6-0069aaffc9a4}">
+        <p14:section name="보충" id="{fc3dfade-cf23-5a3f-07f5-76bf6e7dac68}">
           <p14:sldIdLst>
             <p14:sldId id="267"/>
           </p14:sldIdLst>
